--- a/course/slides/AF-KEYNOTE/AF-KEYNOTE-v1.pptx
+++ b/course/slides/AF-KEYNOTE/AF-KEYNOTE-v1.pptx
@@ -11590,12 +11590,12 @@
         </p:nvSpPr>
         <p:spPr>
           <a:xfrm>
-            <a:off x="609600" y="1795779"/>
-            <a:ext cx="2590800" cy="2039620"/>
+            <a:off x="603250" y="1675129"/>
+            <a:ext cx="4995425" cy="3995420"/>
           </a:xfrm>
           <a:prstGeom prst="roundRect">
             <a:avLst>
-              <a:gd name="adj" fmla="val 14943"/>
+              <a:gd name="adj" fmla="val 1271"/>
             </a:avLst>
           </a:prstGeom>
           <a:solidFill>
@@ -11630,7 +11630,7 @@
       </p:sp>
       <p:pic>
         <p:nvPicPr>
-          <p:cNvPr id="18" name="Picture 17" descr="radar-2C2C2A.png"/>
+          <p:cNvPr id="18" name="Picture 17" descr="pulse-desktop.png"/>
           <p:cNvPicPr>
             <a:picLocks noChangeAspect="1"/>
           </p:cNvPicPr>
@@ -11644,157 +11644,17 @@
         </p:blipFill>
         <p:spPr>
           <a:xfrm>
-            <a:off x="812800" y="2024379"/>
-            <a:ext cx="355600" cy="355600"/>
+            <a:off x="609600" y="1681479"/>
+            <a:ext cx="4982725" cy="3982720"/>
           </a:xfrm>
           <a:prstGeom prst="rect">
             <a:avLst/>
           </a:prstGeom>
         </p:spPr>
       </p:pic>
-      <p:sp>
-        <p:nvSpPr>
-          <p:cNvPr id="19" name="TextBox 18"/>
-          <p:cNvSpPr txBox="1"/>
-          <p:nvPr/>
-        </p:nvSpPr>
-        <p:spPr>
-          <a:xfrm>
-            <a:off x="812800" y="2519679"/>
-            <a:ext cx="2235200" cy="306070"/>
-          </a:xfrm>
-          <a:prstGeom prst="rect">
-            <a:avLst/>
-          </a:prstGeom>
-          <a:noFill/>
-        </p:spPr>
-        <p:txBody>
-          <a:bodyPr wrap="square" lIns="0" rIns="0" tIns="0" bIns="0" anchor="t">
-            <a:noAutofit/>
-          </a:bodyPr>
-          <a:lstStyle/>
-          <a:p>
-            <a:pPr algn="l">
-              <a:lnSpc>
-                <a:spcPts val="2210"/>
-              </a:lnSpc>
-            </a:pPr>
-            <a:r>
-              <a:rPr sz="1700" b="1">
-                <a:solidFill>
-                  <a:srgbClr val="2C2C2A"/>
-                </a:solidFill>
-                <a:latin typeface="Lexend"/>
-              </a:rPr>
-              <a:t>1,004 Live Apps</a:t>
-            </a:r>
-          </a:p>
-        </p:txBody>
-      </p:sp>
-      <p:sp>
-        <p:nvSpPr>
-          <p:cNvPr id="20" name="TextBox 19"/>
-          <p:cNvSpPr txBox="1"/>
-          <p:nvPr/>
-        </p:nvSpPr>
-        <p:spPr>
-          <a:xfrm>
-            <a:off x="812800" y="2838449"/>
-            <a:ext cx="2235200" cy="487680"/>
-          </a:xfrm>
-          <a:prstGeom prst="rect">
-            <a:avLst/>
-          </a:prstGeom>
-          <a:noFill/>
-        </p:spPr>
-        <p:txBody>
-          <a:bodyPr wrap="square" lIns="0" rIns="0" tIns="0" bIns="0" anchor="t">
-            <a:noAutofit/>
-          </a:bodyPr>
-          <a:lstStyle/>
-          <a:p>
-            <a:pPr algn="l">
-              <a:lnSpc>
-                <a:spcPts val="1820"/>
-              </a:lnSpc>
-            </a:pPr>
-            <a:r>
-              <a:rPr sz="1400" b="0">
-                <a:solidFill>
-                  <a:srgbClr val="756E65"/>
-                </a:solidFill>
-                <a:latin typeface="Lexend"/>
-              </a:rPr>
-              <a:t>Watched Every Day On</a:t>
-            </a:r>
-          </a:p>
-          <a:p>
-            <a:pPr algn="l">
-              <a:lnSpc>
-                <a:spcPts val="1820"/>
-              </a:lnSpc>
-            </a:pPr>
-            <a:r>
-              <a:rPr sz="1400" b="0">
-                <a:solidFill>
-                  <a:srgbClr val="756E65"/>
-                </a:solidFill>
-                <a:latin typeface="Lexend"/>
-              </a:rPr>
-              <a:t>The Radar</a:t>
-            </a:r>
-          </a:p>
-        </p:txBody>
-      </p:sp>
-      <p:sp>
-        <p:nvSpPr>
-          <p:cNvPr id="21" name="Rounded Rectangle 20"/>
-          <p:cNvSpPr/>
-          <p:nvPr/>
-        </p:nvSpPr>
-        <p:spPr>
-          <a:xfrm>
-            <a:off x="3403600" y="1795779"/>
-            <a:ext cx="2590800" cy="2039620"/>
-          </a:xfrm>
-          <a:prstGeom prst="roundRect">
-            <a:avLst>
-              <a:gd name="adj" fmla="val 14943"/>
-            </a:avLst>
-          </a:prstGeom>
-          <a:solidFill>
-            <a:srgbClr val="FFFFFF"/>
-          </a:solidFill>
-          <a:ln w="6350">
-            <a:solidFill>
-              <a:srgbClr val="E5E0D8"/>
-            </a:solidFill>
-          </a:ln>
-          <a:effectLst/>
-        </p:spPr>
-        <p:style>
-          <a:lnRef idx="1">
-            <a:schemeClr val="accent1"/>
-          </a:lnRef>
-          <a:fillRef idx="3">
-            <a:schemeClr val="accent1"/>
-          </a:fillRef>
-          <a:effectRef idx="2">
-            <a:schemeClr val="accent1"/>
-          </a:effectRef>
-          <a:fontRef idx="minor">
-            <a:schemeClr val="lt1"/>
-          </a:fontRef>
-        </p:style>
-        <p:txBody>
-          <a:bodyPr rtlCol="0" anchor="ctr"/>
-          <a:lstStyle/>
-          <a:p/>
-        </p:txBody>
-      </p:sp>
       <p:pic>
         <p:nvPicPr>
-          <p:cNvPr id="22" name="Picture 21" descr="rocket-2C2C2A.png"/>
+          <p:cNvPr id="19" name="Picture 18" descr="radar-2C2C2A.png"/>
           <p:cNvPicPr>
             <a:picLocks noChangeAspect="1"/>
           </p:cNvPicPr>
@@ -11808,8 +11668,8 @@
         </p:blipFill>
         <p:spPr>
           <a:xfrm>
-            <a:off x="3606800" y="2024379"/>
-            <a:ext cx="355600" cy="355600"/>
+            <a:off x="5973325" y="1897379"/>
+            <a:ext cx="228600" cy="228600"/>
           </a:xfrm>
           <a:prstGeom prst="rect">
             <a:avLst/>
@@ -11818,147 +11678,46 @@
       </p:pic>
       <p:sp>
         <p:nvSpPr>
-          <p:cNvPr id="23" name="TextBox 22"/>
-          <p:cNvSpPr txBox="1"/>
-          <p:nvPr/>
-        </p:nvSpPr>
-        <p:spPr>
-          <a:xfrm>
-            <a:off x="3606800" y="2519679"/>
-            <a:ext cx="2235200" cy="306070"/>
-          </a:xfrm>
-          <a:prstGeom prst="rect">
-            <a:avLst/>
-          </a:prstGeom>
-          <a:noFill/>
-        </p:spPr>
-        <p:txBody>
-          <a:bodyPr wrap="square" lIns="0" rIns="0" tIns="0" bIns="0" anchor="t">
-            <a:noAutofit/>
-          </a:bodyPr>
-          <a:lstStyle/>
-          <a:p>
-            <a:pPr algn="l">
-              <a:lnSpc>
-                <a:spcPts val="2210"/>
-              </a:lnSpc>
-            </a:pPr>
-            <a:r>
-              <a:rPr sz="1700" b="1">
+          <p:cNvPr id="20" name="TextBox 19"/>
+          <p:cNvSpPr txBox="1"/>
+          <p:nvPr/>
+        </p:nvSpPr>
+        <p:spPr>
+          <a:xfrm>
+            <a:off x="6328925" y="1871979"/>
+            <a:ext cx="5304274" cy="289560"/>
+          </a:xfrm>
+          <a:prstGeom prst="rect">
+            <a:avLst/>
+          </a:prstGeom>
+          <a:noFill/>
+        </p:spPr>
+        <p:txBody>
+          <a:bodyPr wrap="square" lIns="0" rIns="0" tIns="0" bIns="0" anchor="t">
+            <a:noAutofit/>
+          </a:bodyPr>
+          <a:lstStyle/>
+          <a:p>
+            <a:pPr algn="l">
+              <a:lnSpc>
+                <a:spcPts val="2080"/>
+              </a:lnSpc>
+            </a:pPr>
+            <a:r>
+              <a:rPr sz="1600" b="0">
                 <a:solidFill>
                   <a:srgbClr val="2C2C2A"/>
                 </a:solidFill>
-                <a:latin typeface="Lexend"/>
-              </a:rPr>
-              <a:t>1 New App A Day</a:t>
-            </a:r>
-          </a:p>
-        </p:txBody>
-      </p:sp>
-      <p:sp>
-        <p:nvSpPr>
-          <p:cNvPr id="24" name="TextBox 23"/>
-          <p:cNvSpPr txBox="1"/>
-          <p:nvPr/>
-        </p:nvSpPr>
-        <p:spPr>
-          <a:xfrm>
-            <a:off x="3606800" y="2838449"/>
-            <a:ext cx="2235200" cy="487680"/>
-          </a:xfrm>
-          <a:prstGeom prst="rect">
-            <a:avLst/>
-          </a:prstGeom>
-          <a:noFill/>
-        </p:spPr>
-        <p:txBody>
-          <a:bodyPr wrap="square" lIns="0" rIns="0" tIns="0" bIns="0" anchor="t">
-            <a:noAutofit/>
-          </a:bodyPr>
-          <a:lstStyle/>
-          <a:p>
-            <a:pPr algn="l">
-              <a:lnSpc>
-                <a:spcPts val="1820"/>
-              </a:lnSpc>
-            </a:pPr>
-            <a:r>
-              <a:rPr sz="1400" b="0">
-                <a:solidFill>
-                  <a:srgbClr val="756E65"/>
-                </a:solidFill>
-                <a:latin typeface="Lexend"/>
-              </a:rPr>
-              <a:t>Through The Same Nine</a:t>
-            </a:r>
-          </a:p>
-          <a:p>
-            <a:pPr algn="l">
-              <a:lnSpc>
-                <a:spcPts val="1820"/>
-              </a:lnSpc>
-            </a:pPr>
-            <a:r>
-              <a:rPr sz="1400" b="0">
-                <a:solidFill>
-                  <a:srgbClr val="756E65"/>
-                </a:solidFill>
-                <a:latin typeface="Lexend"/>
-              </a:rPr>
-              <a:t>Stages</a:t>
-            </a:r>
-          </a:p>
-        </p:txBody>
-      </p:sp>
-      <p:sp>
-        <p:nvSpPr>
-          <p:cNvPr id="25" name="Rounded Rectangle 24"/>
-          <p:cNvSpPr/>
-          <p:nvPr/>
-        </p:nvSpPr>
-        <p:spPr>
-          <a:xfrm>
-            <a:off x="6197600" y="1795779"/>
-            <a:ext cx="2590800" cy="2039620"/>
-          </a:xfrm>
-          <a:prstGeom prst="roundRect">
-            <a:avLst>
-              <a:gd name="adj" fmla="val 14943"/>
-            </a:avLst>
-          </a:prstGeom>
-          <a:solidFill>
-            <a:srgbClr val="FFFFFF"/>
-          </a:solidFill>
-          <a:ln w="6350">
-            <a:solidFill>
-              <a:srgbClr val="E5E0D8"/>
-            </a:solidFill>
-          </a:ln>
-          <a:effectLst/>
-        </p:spPr>
-        <p:style>
-          <a:lnRef idx="1">
-            <a:schemeClr val="accent1"/>
-          </a:lnRef>
-          <a:fillRef idx="3">
-            <a:schemeClr val="accent1"/>
-          </a:fillRef>
-          <a:effectRef idx="2">
-            <a:schemeClr val="accent1"/>
-          </a:effectRef>
-          <a:fontRef idx="minor">
-            <a:schemeClr val="lt1"/>
-          </a:fontRef>
-        </p:style>
-        <p:txBody>
-          <a:bodyPr rtlCol="0" anchor="ctr"/>
-          <a:lstStyle/>
-          <a:p/>
+                <a:latin typeface="Lexend SemiBold"/>
+              </a:rPr>
+              <a:t>1,004 Live Apps</a:t>
+            </a:r>
+          </a:p>
         </p:txBody>
       </p:sp>
       <p:pic>
         <p:nvPicPr>
-          <p:cNvPr id="26" name="Picture 25" descr="shield-check-2C2C2A.png"/>
+          <p:cNvPr id="21" name="Picture 20" descr="rocket-2C2C2A.png"/>
           <p:cNvPicPr>
             <a:picLocks noChangeAspect="1"/>
           </p:cNvPicPr>
@@ -11972,8 +11731,8 @@
         </p:blipFill>
         <p:spPr>
           <a:xfrm>
-            <a:off x="6400800" y="2024379"/>
-            <a:ext cx="355600" cy="355600"/>
+            <a:off x="5973325" y="2326640"/>
+            <a:ext cx="228600" cy="228600"/>
           </a:xfrm>
           <a:prstGeom prst="rect">
             <a:avLst/>
@@ -11982,163 +11741,46 @@
       </p:pic>
       <p:sp>
         <p:nvSpPr>
-          <p:cNvPr id="27" name="TextBox 26"/>
-          <p:cNvSpPr txBox="1"/>
-          <p:nvPr/>
-        </p:nvSpPr>
-        <p:spPr>
-          <a:xfrm>
-            <a:off x="6400800" y="2519679"/>
-            <a:ext cx="2235200" cy="586740"/>
-          </a:xfrm>
-          <a:prstGeom prst="rect">
-            <a:avLst/>
-          </a:prstGeom>
-          <a:noFill/>
-        </p:spPr>
-        <p:txBody>
-          <a:bodyPr wrap="square" lIns="0" rIns="0" tIns="0" bIns="0" anchor="t">
-            <a:noAutofit/>
-          </a:bodyPr>
-          <a:lstStyle/>
-          <a:p>
-            <a:pPr algn="l">
-              <a:lnSpc>
-                <a:spcPts val="2210"/>
-              </a:lnSpc>
-            </a:pPr>
-            <a:r>
-              <a:rPr sz="1700" b="1">
+          <p:cNvPr id="22" name="TextBox 21"/>
+          <p:cNvSpPr txBox="1"/>
+          <p:nvPr/>
+        </p:nvSpPr>
+        <p:spPr>
+          <a:xfrm>
+            <a:off x="6328925" y="2301240"/>
+            <a:ext cx="5304274" cy="289560"/>
+          </a:xfrm>
+          <a:prstGeom prst="rect">
+            <a:avLst/>
+          </a:prstGeom>
+          <a:noFill/>
+        </p:spPr>
+        <p:txBody>
+          <a:bodyPr wrap="square" lIns="0" rIns="0" tIns="0" bIns="0" anchor="t">
+            <a:noAutofit/>
+          </a:bodyPr>
+          <a:lstStyle/>
+          <a:p>
+            <a:pPr algn="l">
+              <a:lnSpc>
+                <a:spcPts val="2080"/>
+              </a:lnSpc>
+            </a:pPr>
+            <a:r>
+              <a:rPr sz="1600" b="0">
                 <a:solidFill>
                   <a:srgbClr val="2C2C2A"/>
                 </a:solidFill>
-                <a:latin typeface="Lexend"/>
-              </a:rPr>
-              <a:t>Leak Probe: All</a:t>
-            </a:r>
-          </a:p>
-          <a:p>
-            <a:pPr algn="l">
-              <a:lnSpc>
-                <a:spcPts val="2210"/>
-              </a:lnSpc>
-            </a:pPr>
-            <a:r>
-              <a:rPr sz="1700" b="1">
-                <a:solidFill>
-                  <a:srgbClr val="2C2C2A"/>
-                </a:solidFill>
-                <a:latin typeface="Lexend"/>
-              </a:rPr>
-              <a:t>Clear</a:t>
-            </a:r>
-          </a:p>
-        </p:txBody>
-      </p:sp>
-      <p:sp>
-        <p:nvSpPr>
-          <p:cNvPr id="28" name="TextBox 27"/>
-          <p:cNvSpPr txBox="1"/>
-          <p:nvPr/>
-        </p:nvSpPr>
-        <p:spPr>
-          <a:xfrm>
-            <a:off x="6400800" y="3119119"/>
-            <a:ext cx="2235200" cy="487680"/>
-          </a:xfrm>
-          <a:prstGeom prst="rect">
-            <a:avLst/>
-          </a:prstGeom>
-          <a:noFill/>
-        </p:spPr>
-        <p:txBody>
-          <a:bodyPr wrap="square" lIns="0" rIns="0" tIns="0" bIns="0" anchor="t">
-            <a:noAutofit/>
-          </a:bodyPr>
-          <a:lstStyle/>
-          <a:p>
-            <a:pPr algn="l">
-              <a:lnSpc>
-                <a:spcPts val="1820"/>
-              </a:lnSpc>
-            </a:pPr>
-            <a:r>
-              <a:rPr sz="1400" b="0">
-                <a:solidFill>
-                  <a:srgbClr val="756E65"/>
-                </a:solidFill>
-                <a:latin typeface="Lexend"/>
-              </a:rPr>
-              <a:t>Every Table, Every</a:t>
-            </a:r>
-          </a:p>
-          <a:p>
-            <a:pPr algn="l">
-              <a:lnSpc>
-                <a:spcPts val="1820"/>
-              </a:lnSpc>
-            </a:pPr>
-            <a:r>
-              <a:rPr sz="1400" b="0">
-                <a:solidFill>
-                  <a:srgbClr val="756E65"/>
-                </a:solidFill>
-                <a:latin typeface="Lexend"/>
-              </a:rPr>
-              <a:t>Morning At 06:40</a:t>
-            </a:r>
-          </a:p>
-        </p:txBody>
-      </p:sp>
-      <p:sp>
-        <p:nvSpPr>
-          <p:cNvPr id="29" name="Rounded Rectangle 28"/>
-          <p:cNvSpPr/>
-          <p:nvPr/>
-        </p:nvSpPr>
-        <p:spPr>
-          <a:xfrm>
-            <a:off x="8991600" y="1795779"/>
-            <a:ext cx="2590800" cy="2039620"/>
-          </a:xfrm>
-          <a:prstGeom prst="roundRect">
-            <a:avLst>
-              <a:gd name="adj" fmla="val 14943"/>
-            </a:avLst>
-          </a:prstGeom>
-          <a:solidFill>
-            <a:srgbClr val="FFFFFF"/>
-          </a:solidFill>
-          <a:ln w="6350">
-            <a:solidFill>
-              <a:srgbClr val="E5E0D8"/>
-            </a:solidFill>
-          </a:ln>
-          <a:effectLst/>
-        </p:spPr>
-        <p:style>
-          <a:lnRef idx="1">
-            <a:schemeClr val="accent1"/>
-          </a:lnRef>
-          <a:fillRef idx="3">
-            <a:schemeClr val="accent1"/>
-          </a:fillRef>
-          <a:effectRef idx="2">
-            <a:schemeClr val="accent1"/>
-          </a:effectRef>
-          <a:fontRef idx="minor">
-            <a:schemeClr val="lt1"/>
-          </a:fontRef>
-        </p:style>
-        <p:txBody>
-          <a:bodyPr rtlCol="0" anchor="ctr"/>
-          <a:lstStyle/>
-          <a:p/>
+                <a:latin typeface="Lexend SemiBold"/>
+              </a:rPr>
+              <a:t>1 New App A Day</a:t>
+            </a:r>
+          </a:p>
         </p:txBody>
       </p:sp>
       <p:pic>
         <p:nvPicPr>
-          <p:cNvPr id="30" name="Picture 29" descr="user-2C2C2A.png"/>
+          <p:cNvPr id="23" name="Picture 22" descr="shield-check-2C2C2A.png"/>
           <p:cNvPicPr>
             <a:picLocks noChangeAspect="1"/>
           </p:cNvPicPr>
@@ -12152,8 +11794,8 @@
         </p:blipFill>
         <p:spPr>
           <a:xfrm>
-            <a:off x="9194800" y="2024379"/>
-            <a:ext cx="355600" cy="355600"/>
+            <a:off x="5973325" y="2755900"/>
+            <a:ext cx="228600" cy="228600"/>
           </a:xfrm>
           <a:prstGeom prst="rect">
             <a:avLst/>
@@ -12162,110 +11804,102 @@
       </p:pic>
       <p:sp>
         <p:nvSpPr>
-          <p:cNvPr id="31" name="TextBox 30"/>
-          <p:cNvSpPr txBox="1"/>
-          <p:nvPr/>
-        </p:nvSpPr>
-        <p:spPr>
-          <a:xfrm>
-            <a:off x="9194800" y="2519679"/>
-            <a:ext cx="2235200" cy="586740"/>
-          </a:xfrm>
-          <a:prstGeom prst="rect">
-            <a:avLst/>
-          </a:prstGeom>
-          <a:noFill/>
-        </p:spPr>
-        <p:txBody>
-          <a:bodyPr wrap="square" lIns="0" rIns="0" tIns="0" bIns="0" anchor="t">
-            <a:noAutofit/>
-          </a:bodyPr>
-          <a:lstStyle/>
-          <a:p>
-            <a:pPr algn="l">
-              <a:lnSpc>
-                <a:spcPts val="2210"/>
-              </a:lnSpc>
-            </a:pPr>
-            <a:r>
-              <a:rPr sz="1700" b="1">
+          <p:cNvPr id="24" name="TextBox 23"/>
+          <p:cNvSpPr txBox="1"/>
+          <p:nvPr/>
+        </p:nvSpPr>
+        <p:spPr>
+          <a:xfrm>
+            <a:off x="6328925" y="2730500"/>
+            <a:ext cx="5304274" cy="289560"/>
+          </a:xfrm>
+          <a:prstGeom prst="rect">
+            <a:avLst/>
+          </a:prstGeom>
+          <a:noFill/>
+        </p:spPr>
+        <p:txBody>
+          <a:bodyPr wrap="square" lIns="0" rIns="0" tIns="0" bIns="0" anchor="t">
+            <a:noAutofit/>
+          </a:bodyPr>
+          <a:lstStyle/>
+          <a:p>
+            <a:pPr algn="l">
+              <a:lnSpc>
+                <a:spcPts val="2080"/>
+              </a:lnSpc>
+            </a:pPr>
+            <a:r>
+              <a:rPr sz="1600" b="0">
                 <a:solidFill>
                   <a:srgbClr val="2C2C2A"/>
                 </a:solidFill>
-                <a:latin typeface="Lexend"/>
-              </a:rPr>
-              <a:t>Decide Queue: 7 Of</a:t>
-            </a:r>
-          </a:p>
-          <a:p>
-            <a:pPr algn="l">
-              <a:lnSpc>
-                <a:spcPts val="2210"/>
-              </a:lnSpc>
-            </a:pPr>
-            <a:r>
-              <a:rPr sz="1700" b="1">
+                <a:latin typeface="Lexend SemiBold"/>
+              </a:rPr>
+              <a:t>Leak Probe All Clear At 06:40</a:t>
+            </a:r>
+          </a:p>
+        </p:txBody>
+      </p:sp>
+      <p:pic>
+        <p:nvPicPr>
+          <p:cNvPr id="25" name="Picture 24" descr="user-2C2C2A.png"/>
+          <p:cNvPicPr>
+            <a:picLocks noChangeAspect="1"/>
+          </p:cNvPicPr>
+          <p:nvPr/>
+        </p:nvPicPr>
+        <p:blipFill>
+          <a:blip r:embed="rId7"/>
+          <a:stretch>
+            <a:fillRect/>
+          </a:stretch>
+        </p:blipFill>
+        <p:spPr>
+          <a:xfrm>
+            <a:off x="5973325" y="3185160"/>
+            <a:ext cx="228600" cy="228600"/>
+          </a:xfrm>
+          <a:prstGeom prst="rect">
+            <a:avLst/>
+          </a:prstGeom>
+        </p:spPr>
+      </p:pic>
+      <p:sp>
+        <p:nvSpPr>
+          <p:cNvPr id="26" name="TextBox 25"/>
+          <p:cNvSpPr txBox="1"/>
+          <p:nvPr/>
+        </p:nvSpPr>
+        <p:spPr>
+          <a:xfrm>
+            <a:off x="6328925" y="3159760"/>
+            <a:ext cx="5304274" cy="289560"/>
+          </a:xfrm>
+          <a:prstGeom prst="rect">
+            <a:avLst/>
+          </a:prstGeom>
+          <a:noFill/>
+        </p:spPr>
+        <p:txBody>
+          <a:bodyPr wrap="square" lIns="0" rIns="0" tIns="0" bIns="0" anchor="t">
+            <a:noAutofit/>
+          </a:bodyPr>
+          <a:lstStyle/>
+          <a:p>
+            <a:pPr algn="l">
+              <a:lnSpc>
+                <a:spcPts val="2080"/>
+              </a:lnSpc>
+            </a:pPr>
+            <a:r>
+              <a:rPr sz="1600" b="0">
                 <a:solidFill>
                   <a:srgbClr val="2C2C2A"/>
                 </a:solidFill>
-                <a:latin typeface="Lexend"/>
-              </a:rPr>
-              <a:t>10</a:t>
-            </a:r>
-          </a:p>
-        </p:txBody>
-      </p:sp>
-      <p:sp>
-        <p:nvSpPr>
-          <p:cNvPr id="32" name="TextBox 31"/>
-          <p:cNvSpPr txBox="1"/>
-          <p:nvPr/>
-        </p:nvSpPr>
-        <p:spPr>
-          <a:xfrm>
-            <a:off x="9194800" y="3119119"/>
-            <a:ext cx="2235200" cy="487680"/>
-          </a:xfrm>
-          <a:prstGeom prst="rect">
-            <a:avLst/>
-          </a:prstGeom>
-          <a:noFill/>
-        </p:spPr>
-        <p:txBody>
-          <a:bodyPr wrap="square" lIns="0" rIns="0" tIns="0" bIns="0" anchor="t">
-            <a:noAutofit/>
-          </a:bodyPr>
-          <a:lstStyle/>
-          <a:p>
-            <a:pPr algn="l">
-              <a:lnSpc>
-                <a:spcPts val="1820"/>
-              </a:lnSpc>
-            </a:pPr>
-            <a:r>
-              <a:rPr sz="1400" b="0">
-                <a:solidFill>
-                  <a:srgbClr val="756E65"/>
-                </a:solidFill>
-                <a:latin typeface="Lexend"/>
-              </a:rPr>
-              <a:t>Only Real Choices Reach</a:t>
-            </a:r>
-          </a:p>
-          <a:p>
-            <a:pPr algn="l">
-              <a:lnSpc>
-                <a:spcPts val="1820"/>
-              </a:lnSpc>
-            </a:pPr>
-            <a:r>
-              <a:rPr sz="1400" b="0">
-                <a:solidFill>
-                  <a:srgbClr val="756E65"/>
-                </a:solidFill>
-                <a:latin typeface="Lexend"/>
-              </a:rPr>
-              <a:t>A Person</a:t>
+                <a:latin typeface="Lexend SemiBold"/>
+              </a:rPr>
+              <a:t>Decide Queue 7 Of 10</a:t>
             </a:r>
           </a:p>
         </p:txBody>
@@ -28094,11 +27728,11 @@
         <p:spPr>
           <a:xfrm>
             <a:off x="603250" y="1675129"/>
-            <a:ext cx="1930371" cy="3995420"/>
+            <a:ext cx="1913423" cy="3995420"/>
           </a:xfrm>
           <a:prstGeom prst="roundRect">
             <a:avLst>
-              <a:gd name="adj" fmla="val 2631"/>
+              <a:gd name="adj" fmla="val 2654"/>
             </a:avLst>
           </a:prstGeom>
           <a:solidFill>
@@ -28148,7 +27782,7 @@
         <p:spPr>
           <a:xfrm>
             <a:off x="609600" y="1681479"/>
-            <a:ext cx="1917671" cy="3982720"/>
+            <a:ext cx="1900723" cy="3982720"/>
           </a:xfrm>
           <a:prstGeom prst="rect">
             <a:avLst/>
@@ -28171,7 +27805,7 @@
         </p:blipFill>
         <p:spPr>
           <a:xfrm>
-            <a:off x="2908271" y="1897379"/>
+            <a:off x="2891323" y="1897379"/>
             <a:ext cx="228600" cy="228600"/>
           </a:xfrm>
           <a:prstGeom prst="rect">
@@ -28187,8 +27821,8 @@
         </p:nvSpPr>
         <p:spPr>
           <a:xfrm>
-            <a:off x="3263871" y="1871979"/>
-            <a:ext cx="8369328" cy="289560"/>
+            <a:off x="3246923" y="1871979"/>
+            <a:ext cx="8386276" cy="289560"/>
           </a:xfrm>
           <a:prstGeom prst="rect">
             <a:avLst/>
@@ -28234,7 +27868,7 @@
         </p:blipFill>
         <p:spPr>
           <a:xfrm>
-            <a:off x="2908271" y="2326640"/>
+            <a:off x="2891323" y="2326640"/>
             <a:ext cx="228600" cy="228600"/>
           </a:xfrm>
           <a:prstGeom prst="rect">
@@ -28250,8 +27884,8 @@
         </p:nvSpPr>
         <p:spPr>
           <a:xfrm>
-            <a:off x="3263871" y="2301240"/>
-            <a:ext cx="8369328" cy="289560"/>
+            <a:off x="3246923" y="2301240"/>
+            <a:ext cx="8386276" cy="289560"/>
           </a:xfrm>
           <a:prstGeom prst="rect">
             <a:avLst/>
@@ -28297,7 +27931,7 @@
         </p:blipFill>
         <p:spPr>
           <a:xfrm>
-            <a:off x="2908271" y="2755900"/>
+            <a:off x="2891323" y="2755900"/>
             <a:ext cx="228600" cy="228600"/>
           </a:xfrm>
           <a:prstGeom prst="rect">
@@ -28313,8 +27947,8 @@
         </p:nvSpPr>
         <p:spPr>
           <a:xfrm>
-            <a:off x="3263871" y="2730500"/>
-            <a:ext cx="8369328" cy="289560"/>
+            <a:off x="3246923" y="2730500"/>
+            <a:ext cx="8386276" cy="289560"/>
           </a:xfrm>
           <a:prstGeom prst="rect">
             <a:avLst/>
@@ -28360,7 +27994,7 @@
         </p:blipFill>
         <p:spPr>
           <a:xfrm>
-            <a:off x="2908271" y="3185160"/>
+            <a:off x="2891323" y="3185160"/>
             <a:ext cx="228600" cy="228600"/>
           </a:xfrm>
           <a:prstGeom prst="rect">
@@ -28376,8 +28010,8 @@
         </p:nvSpPr>
         <p:spPr>
           <a:xfrm>
-            <a:off x="3263871" y="3159760"/>
-            <a:ext cx="8369328" cy="289560"/>
+            <a:off x="3246923" y="3159760"/>
+            <a:ext cx="8386276" cy="289560"/>
           </a:xfrm>
           <a:prstGeom prst="rect">
             <a:avLst/>
